--- a/decks/maths-sequences/maths-sequences_ch2_linear-non-linear.pptx
+++ b/decks/maths-sequences/maths-sequences_ch2_linear-non-linear.pptx
@@ -123,49 +123,49 @@
   <p:extLst>
     <p:ext uri="{521415D9-36F7-43E2-AB2F-B90AF26B5E84}">
       <p14:sectionLst xmlns:p14="http://schemas.microsoft.com/office/powerpoint/2010/main">
-        <p14:section name="Opening" id="{17aa674a-9af1-6767-3bf4-8ead11787145}">
+        <p14:section name="Opening" id="{f115286d-d5a6-bc4f-02d0-da6c63cde58e}">
           <p14:sldIdLst>
             <p14:sldId id="256"/>
           </p14:sldIdLst>
         </p14:section>
-        <p14:section name="Gate" id="{98813ed3-551d-5812-c5b7-9dcd84cc3f9a}">
+        <p14:section name="Gate" id="{019ec801-caad-e6f3-4581-4ec3a6435338}">
           <p14:sldIdLst>
             <p14:sldId id="257"/>
             <p14:sldId id="258"/>
           </p14:sldIdLst>
         </p14:section>
-        <p14:section name="Pre-teach" id="{674477a3-f8d3-f4cc-d369-fa7affc17a07}">
+        <p14:section name="Pre-teach" id="{84ec9e52-ec6e-fb75-fa95-e6eaf25b77c1}">
           <p14:sldIdLst>
             <p14:sldId id="259"/>
             <p14:sldId id="260"/>
           </p14:sldIdLst>
         </p14:section>
-        <p14:section name="Read-along" id="{bed4763d-026e-fa54-fa39-ba9ce9a4f0c4}">
+        <p14:section name="Read-along" id="{72dcd14a-05ba-e914-2dfe-f53efaccbd87}">
           <p14:sldIdLst>
             <p14:sldId id="261"/>
             <p14:sldId id="262"/>
           </p14:sldIdLst>
         </p14:section>
-        <p14:section name="Teach" id="{b04d79a6-5c94-b8d1-345a-f6b0544d1538}">
+        <p14:section name="Teach" id="{088b56ae-82eb-9c25-fc31-db9fe14fe144}">
           <p14:sldIdLst>
             <p14:sldId id="263"/>
             <p14:sldId id="264"/>
             <p14:sldId id="265"/>
           </p14:sldIdLst>
         </p14:section>
-        <p14:section name="Routes" id="{245ad259-7619-351c-15ba-9c0b6bff734d}">
+        <p14:section name="Routes" id="{e7802492-3690-6b05-aa69-5fd42d4369e8}">
           <p14:sldIdLst>
             <p14:sldId id="266"/>
             <p14:sldId id="267"/>
             <p14:sldId id="268"/>
           </p14:sldIdLst>
         </p14:section>
-        <p14:section name="Close" id="{fa956490-fdd9-75ea-0c47-9e50e1ebceaa}">
+        <p14:section name="Close" id="{6e430eaa-4bed-8ba0-cae5-d57ff68fd8b7}">
           <p14:sldIdLst>
             <p14:sldId id="269"/>
           </p14:sldIdLst>
         </p14:section>
-        <p14:section name="Answers" id="{026ecf5a-ee6b-8975-99e7-ca0760bc76c6}">
+        <p14:section name="Answers" id="{fbff082f-0cab-51f2-8bae-02e390baa813}">
           <p14:sldIdLst>
             <p14:sldId id="270"/>
             <p14:sldId id="271"/>
@@ -1135,7 +1135,7 @@
             <a:r>
               <a:rPr lang="en-US" dirty="0"/>
               <a:t>Answers — task 1: Linear or non-linear?. Reveal the answer; pupils mark their own work in a different colour, then read the "why" together. Same destination for every lane, so one answer serves the whole class.
-Answer: C   5, 10, 20, 40
+Answer: A   5, 10, 20, 40
 Why: 5, 10, 20, 40 has differences 5, 10 and 20, which change, so it is non-linear. The other three sequences each have a constant difference.
 Ask a Support pupil to explain one step, and a Stretch pupil to share their extension.</a:t>
             </a:r>
@@ -1408,7 +1408,7 @@
             <a:r>
               <a:rPr lang="en-US" dirty="0"/>
               <a:t>Do now — retrieval. Silent, no notes, no help: recall comes before any support. Give about four minutes.
-1. Which of these sequences is linear?  →  B   4, 7, 10, 13
+1. Which of these sequences is linear?  →  D   4, 7, 10, 13
 2. Here is a linear sequence: 7, 12, 17, 22. What is the difference between each term and the next?  →  5
 3. A linear sequence has a ___ difference between each term and the next.  →  constant
 Circulate: who gets 3/3 (Stretch route), 2/3 (Core), 0–1 (Support)? Use this to route pupils later in the lesson.</a:t>
@@ -1500,7 +1500,7 @@
             <a:r>
               <a:rPr lang="en-US" dirty="0"/>
               <a:t>Answers — pupils mark their own in a different colour, then hands up for 3/3, 2/3, 1/3.
-1. B   4, 7, 10, 13. Only 4, 7, 10, 13 has a constant difference. Its differences are 3, 3, 3.
+1. D   4, 7, 10, 13. Only 4, 7, 10, 13 has a constant difference. Its differences are 3, 3, 3.
 2. 5. 12 − 7 = 5, 17 − 12 = 5 and 22 − 17 = 5. The difference is 5.
 3. constant. Linear means the same difference every time: the difference is constant.
 Say the route each score points to: 3/3 Stretch, 2/3 Core, 0–1 Support. Pupils may choose to move up.</a:t>
@@ -5095,7 +5095,7 @@
                 <a:ea typeface="Calibri" pitchFamily="34" charset="-122"/>
                 <a:cs typeface="Calibri" pitchFamily="34" charset="-120"/>
               </a:rPr>
-              <a:t>12, 17, 22, 27      </a:t>
+              <a:t>5, 10, 20, 40      </a:t>
             </a:r>
             <a:pPr algn="ctr" indent="0" marL="0">
               <a:buNone/>
@@ -5151,7 +5151,7 @@
                 <a:ea typeface="Calibri" pitchFamily="34" charset="-122"/>
                 <a:cs typeface="Calibri" pitchFamily="34" charset="-120"/>
               </a:rPr>
-              <a:t>5, 10, 20, 40      </a:t>
+              <a:t>3, 13, 23, 33      </a:t>
             </a:r>
             <a:pPr algn="ctr" indent="0" marL="0">
               <a:buNone/>
@@ -5179,7 +5179,7 @@
                 <a:ea typeface="Calibri" pitchFamily="34" charset="-122"/>
                 <a:cs typeface="Calibri" pitchFamily="34" charset="-120"/>
               </a:rPr>
-              <a:t>3, 13, 23, 33</a:t>
+              <a:t>12, 17, 22, 27</a:t>
             </a:r>
             <a:endParaRPr lang="en-US" sz="2000" dirty="0"/>
           </a:p>
@@ -8823,7 +8823,7 @@
                 <a:ea typeface="Cambria" pitchFamily="34" charset="-122"/>
                 <a:cs typeface="Cambria" pitchFamily="34" charset="-120"/>
               </a:rPr>
-              <a:t>C   5, 10, 20, 40</a:t>
+              <a:t>A   5, 10, 20, 40</a:t>
             </a:r>
             <a:endParaRPr lang="en-US" sz="1800" dirty="0"/>
           </a:p>
@@ -10386,7 +10386,7 @@
                 <a:ea typeface="Calibri" pitchFamily="34" charset="-122"/>
                 <a:cs typeface="Calibri" pitchFamily="34" charset="-120"/>
               </a:rPr>
-              <a:t>3, 6, 12, 24</a:t>
+              <a:t>2, 3, 5, 8</a:t>
             </a:r>
             <a:endParaRPr lang="en-US" sz="2400" dirty="0"/>
           </a:p>
@@ -10423,7 +10423,7 @@
                 <a:ea typeface="Calibri" pitchFamily="34" charset="-122"/>
                 <a:cs typeface="Calibri" pitchFamily="34" charset="-120"/>
               </a:rPr>
-              <a:t>4, 7, 10, 13</a:t>
+              <a:t>2, 5, 10, 17</a:t>
             </a:r>
             <a:endParaRPr lang="en-US" sz="2400" dirty="0"/>
           </a:p>
@@ -10460,7 +10460,7 @@
                 <a:ea typeface="Calibri" pitchFamily="34" charset="-122"/>
                 <a:cs typeface="Calibri" pitchFamily="34" charset="-120"/>
               </a:rPr>
-              <a:t>2, 5, 10, 17</a:t>
+              <a:t>3, 6, 12, 24</a:t>
             </a:r>
             <a:endParaRPr lang="en-US" sz="2400" dirty="0"/>
           </a:p>
@@ -10497,7 +10497,7 @@
                 <a:ea typeface="Calibri" pitchFamily="34" charset="-122"/>
                 <a:cs typeface="Calibri" pitchFamily="34" charset="-120"/>
               </a:rPr>
-              <a:t>2, 3, 5, 8</a:t>
+              <a:t>4, 7, 10, 13</a:t>
             </a:r>
             <a:endParaRPr lang="en-US" sz="2400" dirty="0"/>
           </a:p>
@@ -11294,7 +11294,7 @@
                 <a:ea typeface="Calibri" pitchFamily="34" charset="-122"/>
                 <a:cs typeface="Calibri" pitchFamily="34" charset="-120"/>
               </a:rPr>
-              <a:t>B   4, 7, 10, 13</a:t>
+              <a:t>D   4, 7, 10, 13</a:t>
             </a:r>
             <a:endParaRPr lang="en-US" sz="2200" dirty="0"/>
           </a:p>

--- a/decks/maths-sequences/maths-sequences_ch2_linear-non-linear.pptx
+++ b/decks/maths-sequences/maths-sequences_ch2_linear-non-linear.pptx
@@ -123,49 +123,49 @@
   <p:extLst>
     <p:ext uri="{521415D9-36F7-43E2-AB2F-B90AF26B5E84}">
       <p14:sectionLst xmlns:p14="http://schemas.microsoft.com/office/powerpoint/2010/main">
-        <p14:section name="Opening" id="{f115286d-d5a6-bc4f-02d0-da6c63cde58e}">
+        <p14:section name="Opening" id="{e063ee18-0d5f-74aa-7193-adbb88142696}">
           <p14:sldIdLst>
             <p14:sldId id="256"/>
           </p14:sldIdLst>
         </p14:section>
-        <p14:section name="Gate" id="{019ec801-caad-e6f3-4581-4ec3a6435338}">
+        <p14:section name="Gate" id="{1c66b7ee-3fb7-6eaa-adb8-a94dd4fd334a}">
           <p14:sldIdLst>
             <p14:sldId id="257"/>
             <p14:sldId id="258"/>
           </p14:sldIdLst>
         </p14:section>
-        <p14:section name="Pre-teach" id="{84ec9e52-ec6e-fb75-fa95-e6eaf25b77c1}">
+        <p14:section name="Pre-teach" id="{671cc1ff-a3be-0a67-acb0-819b97f605ae}">
           <p14:sldIdLst>
             <p14:sldId id="259"/>
             <p14:sldId id="260"/>
           </p14:sldIdLst>
         </p14:section>
-        <p14:section name="Read-along" id="{72dcd14a-05ba-e914-2dfe-f53efaccbd87}">
+        <p14:section name="Read-along" id="{0917f7bf-d8f8-c4a9-4b63-9a80a37b6a93}">
           <p14:sldIdLst>
             <p14:sldId id="261"/>
             <p14:sldId id="262"/>
           </p14:sldIdLst>
         </p14:section>
-        <p14:section name="Teach" id="{088b56ae-82eb-9c25-fc31-db9fe14fe144}">
+        <p14:section name="Teach" id="{70795504-438e-a1f7-56cb-e7280d208309}">
           <p14:sldIdLst>
             <p14:sldId id="263"/>
             <p14:sldId id="264"/>
             <p14:sldId id="265"/>
           </p14:sldIdLst>
         </p14:section>
-        <p14:section name="Routes" id="{e7802492-3690-6b05-aa69-5fd42d4369e8}">
+        <p14:section name="Routes" id="{5a91dbc0-9440-1ff1-db5f-ef3a27626efa}">
           <p14:sldIdLst>
             <p14:sldId id="266"/>
             <p14:sldId id="267"/>
             <p14:sldId id="268"/>
           </p14:sldIdLst>
         </p14:section>
-        <p14:section name="Close" id="{6e430eaa-4bed-8ba0-cae5-d57ff68fd8b7}">
+        <p14:section name="Close" id="{d58a040d-e69d-3736-e955-596209ec73ea}">
           <p14:sldIdLst>
             <p14:sldId id="269"/>
           </p14:sldIdLst>
         </p14:section>
-        <p14:section name="Answers" id="{fbff082f-0cab-51f2-8bae-02e390baa813}">
+        <p14:section name="Answers" id="{ce5ed3b0-9ad0-961e-ac55-2bbfac72ed64}">
           <p14:sldIdLst>
             <p14:sldId id="270"/>
             <p14:sldId id="271"/>
